--- a/public/cografya/9-sinif/unite-1/GNL-COG9-SN-U1_Hafta-2_Nicin_Cografya_Ogrenmeliyiz_v1.0.pptx
+++ b/public/cografya/9-sinif/unite-1/GNL-COG9-SN-U1_Hafta-2_Nicin_Cografya_Ogrenmeliyiz_v1.0.pptx
@@ -7292,7 +7292,7 @@
                 </a:solidFill>
                 <a:latin typeface="Calibri"/>
               </a:rPr>
-              <a:t>44 / 129</a:t>
+              <a:t>44 / 134</a:t>
             </a:r>
           </a:p>
         </p:txBody>
@@ -8330,7 +8330,7 @@
                 </a:solidFill>
                 <a:latin typeface="Calibri"/>
               </a:rPr>
-              <a:t>53 / 129</a:t>
+              <a:t>53 / 134</a:t>
             </a:r>
           </a:p>
         </p:txBody>
@@ -9072,7 +9072,7 @@
                 </a:solidFill>
                 <a:latin typeface="Calibri"/>
               </a:rPr>
-              <a:t>54 / 129</a:t>
+              <a:t>54 / 134</a:t>
             </a:r>
           </a:p>
         </p:txBody>
@@ -9888,7 +9888,7 @@
                 </a:solidFill>
                 <a:latin typeface="Calibri"/>
               </a:rPr>
-              <a:t>55 / 129</a:t>
+              <a:t>55 / 134</a:t>
             </a:r>
           </a:p>
         </p:txBody>
@@ -10848,7 +10848,7 @@
                 </a:solidFill>
                 <a:latin typeface="Calibri"/>
               </a:rPr>
-              <a:t>56 / 129</a:t>
+              <a:t>56 / 134</a:t>
             </a:r>
           </a:p>
         </p:txBody>
@@ -11858,7 +11858,7 @@
                 </a:solidFill>
                 <a:latin typeface="Calibri"/>
               </a:rPr>
-              <a:t>57 / 129</a:t>
+              <a:t>57 / 134</a:t>
             </a:r>
           </a:p>
         </p:txBody>
@@ -12818,7 +12818,7 @@
                 </a:solidFill>
                 <a:latin typeface="Calibri"/>
               </a:rPr>
-              <a:t>58 / 129</a:t>
+              <a:t>58 / 134</a:t>
             </a:r>
           </a:p>
         </p:txBody>
@@ -13828,7 +13828,7 @@
                 </a:solidFill>
                 <a:latin typeface="Calibri"/>
               </a:rPr>
-              <a:t>59 / 129</a:t>
+              <a:t>59 / 134</a:t>
             </a:r>
           </a:p>
         </p:txBody>
@@ -15106,7 +15106,7 @@
                 </a:solidFill>
                 <a:latin typeface="Calibri"/>
               </a:rPr>
-              <a:t>60 / 129</a:t>
+              <a:t>60 / 134</a:t>
             </a:r>
           </a:p>
         </p:txBody>
@@ -15636,7 +15636,7 @@
                 </a:solidFill>
                 <a:latin typeface="Calibri"/>
               </a:rPr>
-              <a:t>61 / 129</a:t>
+              <a:t>61 / 134</a:t>
             </a:r>
           </a:p>
         </p:txBody>
@@ -17822,7 +17822,7 @@
                 </a:solidFill>
                 <a:latin typeface="Calibri"/>
               </a:rPr>
-              <a:t>62 / 129</a:t>
+              <a:t>62 / 134</a:t>
             </a:r>
           </a:p>
         </p:txBody>
@@ -18793,7 +18793,7 @@
                 </a:solidFill>
                 <a:latin typeface="Calibri"/>
               </a:rPr>
-              <a:t>45 / 129</a:t>
+              <a:t>45 / 134</a:t>
             </a:r>
           </a:p>
         </p:txBody>
@@ -20393,7 +20393,7 @@
                 </a:solidFill>
                 <a:latin typeface="Calibri"/>
               </a:rPr>
-              <a:t>63 / 129</a:t>
+              <a:t>63 / 134</a:t>
             </a:r>
           </a:p>
         </p:txBody>
@@ -22181,7 +22181,7 @@
                 </a:solidFill>
                 <a:latin typeface="Calibri"/>
               </a:rPr>
-              <a:t>64 / 129</a:t>
+              <a:t>64 / 134</a:t>
             </a:r>
           </a:p>
         </p:txBody>
@@ -22783,7 +22783,7 @@
                 </a:solidFill>
                 <a:latin typeface="Calibri"/>
               </a:rPr>
-              <a:t>65 / 129</a:t>
+              <a:t>65 / 134</a:t>
             </a:r>
           </a:p>
         </p:txBody>
@@ -23665,7 +23665,7 @@
                 </a:solidFill>
                 <a:latin typeface="Calibri"/>
               </a:rPr>
-              <a:t>66 / 129</a:t>
+              <a:t>66 / 134</a:t>
             </a:r>
           </a:p>
         </p:txBody>
@@ -24867,7 +24867,7 @@
                 </a:solidFill>
                 <a:latin typeface="Calibri"/>
               </a:rPr>
-              <a:t>67 / 129</a:t>
+              <a:t>67 / 134</a:t>
             </a:r>
           </a:p>
         </p:txBody>
@@ -26197,7 +26197,7 @@
                 </a:solidFill>
                 <a:latin typeface="Calibri"/>
               </a:rPr>
-              <a:t>68 / 129</a:t>
+              <a:t>68 / 134</a:t>
             </a:r>
           </a:p>
         </p:txBody>
@@ -26999,7 +26999,7 @@
                 </a:solidFill>
                 <a:latin typeface="Calibri"/>
               </a:rPr>
-              <a:t>69 / 129</a:t>
+              <a:t>69 / 134</a:t>
             </a:r>
           </a:p>
         </p:txBody>
@@ -28139,7 +28139,7 @@
                 </a:solidFill>
                 <a:latin typeface="Calibri"/>
               </a:rPr>
-              <a:t>70 / 129</a:t>
+              <a:t>70 / 134</a:t>
             </a:r>
           </a:p>
         </p:txBody>
@@ -28853,7 +28853,7 @@
                 </a:solidFill>
                 <a:latin typeface="Calibri"/>
               </a:rPr>
-              <a:t>71 / 129</a:t>
+              <a:t>71 / 134</a:t>
             </a:r>
           </a:p>
         </p:txBody>
@@ -29749,7 +29749,7 @@
                 </a:solidFill>
                 <a:latin typeface="Calibri"/>
               </a:rPr>
-              <a:t>72 / 129</a:t>
+              <a:t>72 / 134</a:t>
             </a:r>
           </a:p>
         </p:txBody>
@@ -31739,7 +31739,7 @@
                 </a:solidFill>
                 <a:latin typeface="Calibri"/>
               </a:rPr>
-              <a:t>46 / 129</a:t>
+              <a:t>46 / 134</a:t>
             </a:r>
           </a:p>
         </p:txBody>
@@ -32699,7 +32699,7 @@
                 </a:solidFill>
                 <a:latin typeface="Calibri"/>
               </a:rPr>
-              <a:t>73 / 129</a:t>
+              <a:t>73 / 134</a:t>
             </a:r>
           </a:p>
         </p:txBody>
@@ -33709,7 +33709,7 @@
                 </a:solidFill>
                 <a:latin typeface="Calibri"/>
               </a:rPr>
-              <a:t>74 / 129</a:t>
+              <a:t>74 / 134</a:t>
             </a:r>
           </a:p>
         </p:txBody>
@@ -34755,7 +34755,7 @@
                 </a:solidFill>
                 <a:latin typeface="Calibri"/>
               </a:rPr>
-              <a:t>75 / 129</a:t>
+              <a:t>75 / 134</a:t>
             </a:r>
           </a:p>
         </p:txBody>
@@ -36051,7 +36051,7 @@
                 </a:solidFill>
                 <a:latin typeface="Calibri"/>
               </a:rPr>
-              <a:t>76 / 129</a:t>
+              <a:t>76 / 134</a:t>
             </a:r>
           </a:p>
         </p:txBody>
@@ -37347,7 +37347,7 @@
                 </a:solidFill>
                 <a:latin typeface="Calibri"/>
               </a:rPr>
-              <a:t>77 / 129</a:t>
+              <a:t>77 / 134</a:t>
             </a:r>
           </a:p>
         </p:txBody>
@@ -37999,7 +37999,7 @@
                 </a:solidFill>
                 <a:latin typeface="Calibri"/>
               </a:rPr>
-              <a:t>78 / 129</a:t>
+              <a:t>78 / 134</a:t>
             </a:r>
           </a:p>
         </p:txBody>
@@ -39812,7 +39812,7 @@
                 </a:solidFill>
                 <a:latin typeface="Calibri"/>
               </a:rPr>
-              <a:t>79 / 129</a:t>
+              <a:t>79 / 134</a:t>
             </a:r>
           </a:p>
         </p:txBody>
@@ -40600,7 +40600,7 @@
                 </a:solidFill>
                 <a:latin typeface="Calibri"/>
               </a:rPr>
-              <a:t>80 / 129</a:t>
+              <a:t>80 / 134</a:t>
             </a:r>
           </a:p>
         </p:txBody>
@@ -41832,7 +41832,7 @@
                 </a:solidFill>
                 <a:latin typeface="Calibri"/>
               </a:rPr>
-              <a:t>81 / 129</a:t>
+              <a:t>81 / 134</a:t>
             </a:r>
           </a:p>
         </p:txBody>
@@ -42277,7 +42277,7 @@
                 </a:solidFill>
                 <a:latin typeface="Calibri"/>
               </a:rPr>
-              <a:t>okulapp.org/cografya · sürüm 2026.10</a:t>
+              <a:t>okulapp.org/cografya · sürüm 2026.10.1</a:t>
             </a:r>
           </a:p>
         </p:txBody>
@@ -44771,7 +44771,7 @@
                 </a:solidFill>
                 <a:latin typeface="Calibri"/>
               </a:rPr>
-              <a:t>47 / 129</a:t>
+              <a:t>47 / 134</a:t>
             </a:r>
           </a:p>
         </p:txBody>
@@ -45649,7 +45649,7 @@
                 </a:solidFill>
                 <a:latin typeface="Calibri"/>
               </a:rPr>
-              <a:t>48 / 129</a:t>
+              <a:t>48 / 134</a:t>
             </a:r>
           </a:p>
         </p:txBody>
@@ -46342,7 +46342,7 @@
                 </a:solidFill>
                 <a:latin typeface="Calibri"/>
               </a:rPr>
-              <a:t>49 / 129</a:t>
+              <a:t>49 / 134</a:t>
             </a:r>
           </a:p>
         </p:txBody>
@@ -47229,7 +47229,7 @@
                 </a:solidFill>
                 <a:latin typeface="Calibri"/>
               </a:rPr>
-              <a:t>50 / 129</a:t>
+              <a:t>50 / 134</a:t>
             </a:r>
           </a:p>
         </p:txBody>
@@ -47988,7 +47988,7 @@
                 </a:solidFill>
                 <a:latin typeface="Calibri"/>
               </a:rPr>
-              <a:t>51 / 129</a:t>
+              <a:t>51 / 134</a:t>
             </a:r>
           </a:p>
         </p:txBody>
@@ -48810,7 +48810,7 @@
                 </a:solidFill>
                 <a:latin typeface="Calibri"/>
               </a:rPr>
-              <a:t>52 / 129</a:t>
+              <a:t>52 / 134</a:t>
             </a:r>
           </a:p>
         </p:txBody>
